--- a/ppt/midterm/郑彦文-2022112879.pptx
+++ b/ppt/midterm/郑彦文-2022112879.pptx
@@ -5059,7 +5059,7 @@
             <a:p>
               <a:pPr/>
               <a:r>
-                <a:t>4月1日-4月8日</a:t>
+                <a:t>4月1日-4月22日</a:t>
               </a:r>
             </a:p>
           </p:txBody>
@@ -5673,7 +5673,7 @@
             <a:p>
               <a:pPr/>
               <a:r>
-                <a:t>4月8日-4月30日</a:t>
+                <a:t>4月22日-4月30日</a:t>
               </a:r>
             </a:p>
           </p:txBody>
